--- a/slides/week04/ch05_gtfs.pptx
+++ b/slides/week04/ch05_gtfs.pptx
@@ -24,6 +24,7 @@
     <p:sldId id="272" r:id="rId23"/>
     <p:sldId id="273" r:id="rId24"/>
     <p:sldId id="274" r:id="rId25"/>
+    <p:sldId id="275" r:id="rId26"/>
   </p:sldIdLst>
   <p:notesMasterIdLst>
     <p:notesMasterId r:id="rId15"/>
@@ -589,7 +590,7 @@
           <a:lstStyle/>
           <a:p>
             <a:r>
-              <a:t>실습에서 하남시청 정류장을 지나는 노선과 각 노선의 운행 수를 계산한다. 그것이 그 정류장의 공급 수준이고, 기말 프로젝트에서 무당이에 대해 같은 계산을 한다.</a:t>
+              <a:t>smartmob.data.gtfs.clip_to_boundary가 이 순서로 되어 있다. 기말 프로젝트에서 무당이 GTFS를 다룰 때 같은 문제를 겪는다.</a:t>
             </a:r>
           </a:p>
         </p:txBody>
@@ -659,6 +660,76 @@
           <a:lstStyle/>
           <a:p>
             <a:r>
+              <a:t>실습에서 하남시청 정류장을 지나는 노선과 각 노선의 운행 수를 계산한다. 그것이 그 정류장의 공급 수준이고, 기말 프로젝트에서 무당이에 대해 같은 계산을 한다.</a:t>
+            </a:r>
+          </a:p>
+        </p:txBody>
+      </p:sp>
+      <p:sp>
+        <p:nvSpPr>
+          <p:cNvPr id="4" name="Slide Number Placeholder 3"/>
+          <p:cNvSpPr>
+            <a:spLocks noGrp="1"/>
+          </p:cNvSpPr>
+          <p:nvPr>
+            <p:ph type="sldNum" idx="5" sz="quarter"/>
+          </p:nvPr>
+        </p:nvSpPr>
+        <p:spPr/>
+      </p:sp>
+    </p:spTree>
+  </p:cSld>
+  <p:clrMapOvr>
+    <a:masterClrMapping/>
+  </p:clrMapOvr>
+</p:notes>
+</file>
+
+<file path=ppt/notesSlides/notesSlide12.xml><?xml version="1.0" encoding="utf-8"?>
+<p:notes xmlns:a="http://schemas.openxmlformats.org/drawingml/2006/main" xmlns:p="http://schemas.openxmlformats.org/presentationml/2006/main" xmlns:r="http://schemas.openxmlformats.org/officeDocument/2006/relationships">
+  <p:cSld>
+    <p:spTree>
+      <p:nvGrpSpPr>
+        <p:cNvPr id="1" name=""/>
+        <p:cNvGrpSpPr/>
+        <p:nvPr/>
+      </p:nvGrpSpPr>
+      <p:grpSpPr>
+        <a:xfrm>
+          <a:off x="0" y="0"/>
+          <a:ext cx="0" cy="0"/>
+          <a:chOff x="0" y="0"/>
+          <a:chExt cx="0" cy="0"/>
+        </a:xfrm>
+      </p:grpSpPr>
+      <p:sp>
+        <p:nvSpPr>
+          <p:cNvPr id="2" name="Slide Image Placeholder 1"/>
+          <p:cNvSpPr>
+            <a:spLocks noGrp="1"/>
+          </p:cNvSpPr>
+          <p:nvPr>
+            <p:ph type="sldImg" idx="2"/>
+          </p:nvPr>
+        </p:nvSpPr>
+        <p:spPr/>
+      </p:sp>
+      <p:sp>
+        <p:nvSpPr>
+          <p:cNvPr id="3" name="Notes Placeholder 2"/>
+          <p:cNvSpPr>
+            <a:spLocks noGrp="1"/>
+          </p:cNvSpPr>
+          <p:nvPr>
+            <p:ph type="body" idx="3" sz="quarter"/>
+          </p:nvPr>
+        </p:nvSpPr>
+        <p:spPr/>
+        <p:txBody>
+          <a:bodyPr/>
+          <a:lstStyle/>
+          <a:p>
+            <a:r>
               <a:t>연습 5.3의 순서가 같은 운행 묶음이 6장에서 중요해진다. 한 노선에 여러 순서가 나오는 이유는 상행과 하행, 지선, 회차다.</a:t>
             </a:r>
           </a:p>
@@ -869,7 +940,7 @@
           <a:lstStyle/>
           <a:p>
             <a:r>
-              <a:t>GTFS는 텍스트 파일 여덟 개짜리 zip이고 이 책에서 쓰는 것이 다섯 개다. 위에서 아래로 routes에서 trips, stop_times, stops 순서로 이어진다.</a:t>
+              <a:t>슬라이드는 개요만 다룬다. 세부 내용과 코드는 교재 원고와 실습 노트북에서 확인한다. 교재 저장소는 비공개이므로 초대받은 계정으로 로그인한 상태여야 주소가 열린다.</a:t>
             </a:r>
           </a:p>
         </p:txBody>
@@ -939,7 +1010,7 @@
           <a:lstStyle/>
           <a:p>
             <a:r>
-              <a:t>이 구분을 놓치면 6장에서 RAPTOR를 구현할 때 노선 단위 순회와 운행 단위 승차를 섞게 된다.</a:t>
+              <a:t>GTFS는 텍스트 파일 여덟 개짜리 zip이고 이 책에서 쓰는 것이 다섯 개다. 위에서 아래로 routes에서 trips, stop_times, stops 순서로 이어진다.</a:t>
             </a:r>
           </a:p>
         </p:txBody>
@@ -1009,7 +1080,7 @@
           <a:lstStyle/>
           <a:p>
             <a:r>
-              <a:t>route_type이 3인 것만 버스로 거르면 하남시 버스가 4개만 나온다. 다른 나라 데이터로 만든 코드를 한국 데이터에 그대로 쓰면 이런 일이 생긴다. 2장의 검증 습관이 여기서도 필요하다.</a:t>
+              <a:t>이 구분을 놓치면 6장에서 RAPTOR를 구현할 때 노선 단위 순회와 운행 단위 승차를 섞게 된다.</a:t>
             </a:r>
           </a:p>
         </p:txBody>
@@ -1079,7 +1150,7 @@
           <a:lstStyle/>
           <a:p>
             <a:r>
-              <a:t>파싱은 자정부터의 초로 변환한다. 25:30:00은 다음 날 새벽 1시 30분이고 같은 운행일이다. smartmob.data.parse_gtfs_time이 이 일을 하고 6장에서 계속 쓴다.</a:t>
+              <a:t>route_type이 3인 것만 버스로 거르면 하남시 버스가 4개만 나온다. 다른 나라 데이터로 만든 코드를 한국 데이터에 그대로 쓰면 이런 일이 생긴다. 2장의 검증 습관이 여기서도 필요하다.</a:t>
             </a:r>
           </a:p>
         </p:txBody>
@@ -1149,7 +1220,7 @@
           <a:lstStyle/>
           <a:p>
             <a:r>
-              <a:t>위도 37도에서는 경도 1도가 위도 1도보다 짧아서 종횡비를 보정해야 지도 모양이 맞는다.</a:t>
+              <a:t>파싱은 자정부터의 초로 변환한다. 25:30:00은 다음 날 새벽 1시 30분이고 같은 운행일이다. smartmob.data.parse_gtfs_time이 이 일을 하고 6장에서 계속 쓴다.</a:t>
             </a:r>
           </a:p>
         </p:txBody>
@@ -1219,7 +1290,7 @@
           <a:lstStyle/>
           <a:p>
             <a:r>
-              <a:t>smartmob.data.gtfs.clip_to_boundary가 이 순서로 되어 있다. 기말 프로젝트에서 무당이 GTFS를 다룰 때 같은 문제를 겪는다.</a:t>
+              <a:t>위도 37도에서는 경도 1도가 위도 1도보다 짧아서 종횡비를 보정해야 지도 모양이 맞는다.</a:t>
             </a:r>
           </a:p>
         </p:txBody>
@@ -4854,12 +4925,12 @@
       <p:grpSpPr/>
       <p:sp>
         <p:nvSpPr>
-          <p:cNvPr id="2" name="Title 1"/>
-          <p:cNvSpPr>
-            <a:spLocks noGrp="1"/>
-          </p:cNvSpPr>
-          <p:nvPr>
-            <p:ph type="title" idx="100"/>
+          <p:cNvPr id="2" name="Text Placeholder 1"/>
+          <p:cNvSpPr>
+            <a:spLocks noGrp="1"/>
+          </p:cNvSpPr>
+          <p:nvPr>
+            <p:ph type="body" idx="100"/>
           </p:nvPr>
         </p:nvSpPr>
         <p:spPr/>
@@ -4868,19 +4939,19 @@
           <a:lstStyle/>
           <a:p>
             <a:r>
-              <a:t>3.1 TAGO 코드와 국제 명세</a:t>
-            </a:r>
-          </a:p>
-        </p:txBody>
-      </p:sp>
-      <p:sp>
-        <p:nvSpPr>
-          <p:cNvPr id="3" name="Text Placeholder 2"/>
-          <p:cNvSpPr>
-            <a:spLocks noGrp="1"/>
-          </p:cNvSpPr>
-          <p:nvPr>
-            <p:ph type="body" idx="101"/>
+              <a:t>03</a:t>
+            </a:r>
+          </a:p>
+        </p:txBody>
+      </p:sp>
+      <p:sp>
+        <p:nvSpPr>
+          <p:cNvPr id="3" name="Title 2"/>
+          <p:cNvSpPr>
+            <a:spLocks noGrp="1"/>
+          </p:cNvSpPr>
+          <p:nvPr>
+            <p:ph type="title" idx="101"/>
           </p:nvPr>
         </p:nvSpPr>
         <p:spPr/>
@@ -4889,7 +4960,7 @@
           <a:lstStyle/>
           <a:p>
             <a:r>
-              <a:t>3. 교재 5.2 한국의 route_type</a:t>
+              <a:t>교재 5.2 한국의 route_type</a:t>
             </a:r>
           </a:p>
         </p:txBody>
@@ -4909,33 +4980,51 @@
           <a:bodyPr/>
           <a:lstStyle/>
           <a:p>
-            <a:pPr/>
-            <a:r>
-              <a:t>국제 명세대로 읽으면 하남시에 트램 132개 노선</a:t>
-            </a:r>
-          </a:p>
-          <a:p>
-            <a:pPr/>
-            <a:r>
-              <a:t>오류 없이 실행되고 결과 숫자만 이상해짐</a:t>
-            </a:r>
-          </a:p>
-          <a:p>
-            <a:pPr/>
-            <a:r>
-              <a:t>그 외 하남 데이터: 공항리무진 8개, 일반철도 6개</a:t>
-            </a:r>
-          </a:p>
-        </p:txBody>
-      </p:sp>
-      <p:sp>
-        <p:nvSpPr>
-          <p:cNvPr id="5" name="Text Placeholder 4"/>
-          <p:cNvSpPr>
-            <a:spLocks noGrp="1"/>
-          </p:cNvSpPr>
-          <p:nvPr>
-            <p:ph type="body" idx="103"/>
+            <a:pPr>
+              <a:spcAft>
+                <a:spcPts val="1000"/>
+              </a:spcAft>
+            </a:pPr>
+            <a:r>
+              <a:rPr>
+                <a:solidFill>
+                  <a:srgbClr val="AFAFAF"/>
+                </a:solidFill>
+              </a:rPr>
+              <a:t>3.1  </a:t>
+            </a:r>
+            <a:r>
+              <a:t>TAGO 코드와 국제 명세</a:t>
+            </a:r>
+          </a:p>
+        </p:txBody>
+      </p:sp>
+    </p:spTree>
+  </p:cSld>
+  <p:clrMapOvr>
+    <a:masterClrMapping/>
+  </p:clrMapOvr>
+</p:sld>
+</file>
+
+<file path=ppt/slides/slide11.xml><?xml version="1.0" encoding="utf-8"?>
+<p:sld xmlns:a="http://schemas.openxmlformats.org/drawingml/2006/main" xmlns:p="http://schemas.openxmlformats.org/presentationml/2006/main" xmlns:r="http://schemas.openxmlformats.org/officeDocument/2006/relationships">
+  <p:cSld>
+    <p:spTree>
+      <p:nvGrpSpPr>
+        <p:cNvPr id="1" name=""/>
+        <p:cNvGrpSpPr/>
+        <p:nvPr/>
+      </p:nvGrpSpPr>
+      <p:grpSpPr/>
+      <p:sp>
+        <p:nvSpPr>
+          <p:cNvPr id="2" name="Title 1"/>
+          <p:cNvSpPr>
+            <a:spLocks noGrp="1"/>
+          </p:cNvSpPr>
+          <p:nvPr>
+            <p:ph type="title" idx="100"/>
           </p:nvPr>
         </p:nvSpPr>
         <p:spPr/>
@@ -4944,7 +5033,83 @@
           <a:lstStyle/>
           <a:p>
             <a:r>
-              <a:t>표 2. route_type 값의 해석 차이와 하남 GTFS의 노선 수</a:t>
+              <a:t>3.1 TAGO 코드와 국제 명세</a:t>
+            </a:r>
+          </a:p>
+        </p:txBody>
+      </p:sp>
+      <p:sp>
+        <p:nvSpPr>
+          <p:cNvPr id="3" name="Text Placeholder 2"/>
+          <p:cNvSpPr>
+            <a:spLocks noGrp="1"/>
+          </p:cNvSpPr>
+          <p:nvPr>
+            <p:ph type="body" idx="101"/>
+          </p:nvPr>
+        </p:nvSpPr>
+        <p:spPr/>
+        <p:txBody>
+          <a:bodyPr/>
+          <a:lstStyle/>
+          <a:p>
+            <a:r>
+              <a:t>3. 교재 5.2 한국의 route_type</a:t>
+            </a:r>
+          </a:p>
+        </p:txBody>
+      </p:sp>
+      <p:sp>
+        <p:nvSpPr>
+          <p:cNvPr id="4" name="Text Placeholder 3"/>
+          <p:cNvSpPr>
+            <a:spLocks noGrp="1"/>
+          </p:cNvSpPr>
+          <p:nvPr>
+            <p:ph type="body" idx="102"/>
+          </p:nvPr>
+        </p:nvSpPr>
+        <p:spPr/>
+        <p:txBody>
+          <a:bodyPr/>
+          <a:lstStyle/>
+          <a:p>
+            <a:pPr/>
+            <a:r>
+              <a:t>국제 명세대로 읽으면 하남시에 트램 132개 노선</a:t>
+            </a:r>
+          </a:p>
+          <a:p>
+            <a:pPr/>
+            <a:r>
+              <a:t>오류 없이 실행되고 결과 숫자만 이상해짐</a:t>
+            </a:r>
+          </a:p>
+          <a:p>
+            <a:pPr/>
+            <a:r>
+              <a:t>그 외 하남 데이터: 공항리무진 8개, 일반철도 6개</a:t>
+            </a:r>
+          </a:p>
+        </p:txBody>
+      </p:sp>
+      <p:sp>
+        <p:nvSpPr>
+          <p:cNvPr id="5" name="Text Placeholder 4"/>
+          <p:cNvSpPr>
+            <a:spLocks noGrp="1"/>
+          </p:cNvSpPr>
+          <p:nvPr>
+            <p:ph type="body" idx="103"/>
+          </p:nvPr>
+        </p:nvSpPr>
+        <p:spPr/>
+        <p:txBody>
+          <a:bodyPr/>
+          <a:lstStyle/>
+          <a:p>
+            <a:r>
+              <a:t>표 3. route_type 값의 해석 차이와 하남 GTFS의 노선 수</a:t>
             </a:r>
           </a:p>
         </p:txBody>
@@ -5609,100 +5774,6 @@
 </p:sld>
 </file>
 
-<file path=ppt/slides/slide11.xml><?xml version="1.0" encoding="utf-8"?>
-<p:sld xmlns:a="http://schemas.openxmlformats.org/drawingml/2006/main" xmlns:p="http://schemas.openxmlformats.org/presentationml/2006/main" xmlns:r="http://schemas.openxmlformats.org/officeDocument/2006/relationships">
-  <p:cSld>
-    <p:spTree>
-      <p:nvGrpSpPr>
-        <p:cNvPr id="1" name=""/>
-        <p:cNvGrpSpPr/>
-        <p:nvPr/>
-      </p:nvGrpSpPr>
-      <p:grpSpPr/>
-      <p:sp>
-        <p:nvSpPr>
-          <p:cNvPr id="2" name="Text Placeholder 1"/>
-          <p:cNvSpPr>
-            <a:spLocks noGrp="1"/>
-          </p:cNvSpPr>
-          <p:nvPr>
-            <p:ph type="body" idx="100"/>
-          </p:nvPr>
-        </p:nvSpPr>
-        <p:spPr/>
-        <p:txBody>
-          <a:bodyPr/>
-          <a:lstStyle/>
-          <a:p>
-            <a:r>
-              <a:t>04</a:t>
-            </a:r>
-          </a:p>
-        </p:txBody>
-      </p:sp>
-      <p:sp>
-        <p:nvSpPr>
-          <p:cNvPr id="3" name="Title 2"/>
-          <p:cNvSpPr>
-            <a:spLocks noGrp="1"/>
-          </p:cNvSpPr>
-          <p:nvPr>
-            <p:ph type="title" idx="101"/>
-          </p:nvPr>
-        </p:nvSpPr>
-        <p:spPr/>
-        <p:txBody>
-          <a:bodyPr/>
-          <a:lstStyle/>
-          <a:p>
-            <a:r>
-              <a:t>교재 5.3 24시 초과 시각</a:t>
-            </a:r>
-          </a:p>
-        </p:txBody>
-      </p:sp>
-      <p:sp>
-        <p:nvSpPr>
-          <p:cNvPr id="4" name="Text Placeholder 3"/>
-          <p:cNvSpPr>
-            <a:spLocks noGrp="1"/>
-          </p:cNvSpPr>
-          <p:nvPr>
-            <p:ph type="body" idx="102"/>
-          </p:nvPr>
-        </p:nvSpPr>
-        <p:spPr/>
-        <p:txBody>
-          <a:bodyPr/>
-          <a:lstStyle/>
-          <a:p>
-            <a:pPr>
-              <a:spcAft>
-                <a:spcPts val="1000"/>
-              </a:spcAft>
-            </a:pPr>
-            <a:r>
-              <a:rPr>
-                <a:solidFill>
-                  <a:srgbClr val="AFAFAF"/>
-                </a:solidFill>
-              </a:rPr>
-              <a:t>4.1  </a:t>
-            </a:r>
-            <a:r>
-              <a:t>30시가 나오는 이유</a:t>
-            </a:r>
-          </a:p>
-        </p:txBody>
-      </p:sp>
-    </p:spTree>
-  </p:cSld>
-  <p:clrMapOvr>
-    <a:masterClrMapping/>
-  </p:clrMapOvr>
-</p:sld>
-</file>
-
 <file path=ppt/slides/slide12.xml><?xml version="1.0" encoding="utf-8"?>
 <p:sld xmlns:a="http://schemas.openxmlformats.org/drawingml/2006/main" xmlns:p="http://schemas.openxmlformats.org/presentationml/2006/main" xmlns:r="http://schemas.openxmlformats.org/officeDocument/2006/relationships">
   <p:cSld>
@@ -5715,12 +5786,12 @@
       <p:grpSpPr/>
       <p:sp>
         <p:nvSpPr>
-          <p:cNvPr id="2" name="Title 1"/>
-          <p:cNvSpPr>
-            <a:spLocks noGrp="1"/>
-          </p:cNvSpPr>
-          <p:nvPr>
-            <p:ph type="title" idx="100"/>
+          <p:cNvPr id="2" name="Text Placeholder 1"/>
+          <p:cNvSpPr>
+            <a:spLocks noGrp="1"/>
+          </p:cNvSpPr>
+          <p:nvPr>
+            <p:ph type="body" idx="100"/>
           </p:nvPr>
         </p:nvSpPr>
         <p:spPr/>
@@ -5729,19 +5800,19 @@
           <a:lstStyle/>
           <a:p>
             <a:r>
-              <a:t>4.1 30시가 나오는 이유</a:t>
-            </a:r>
-          </a:p>
-        </p:txBody>
-      </p:sp>
-      <p:sp>
-        <p:nvSpPr>
-          <p:cNvPr id="3" name="Text Placeholder 2"/>
-          <p:cNvSpPr>
-            <a:spLocks noGrp="1"/>
-          </p:cNvSpPr>
-          <p:nvPr>
-            <p:ph type="body" idx="101"/>
+              <a:t>04</a:t>
+            </a:r>
+          </a:p>
+        </p:txBody>
+      </p:sp>
+      <p:sp>
+        <p:nvSpPr>
+          <p:cNvPr id="3" name="Title 2"/>
+          <p:cNvSpPr>
+            <a:spLocks noGrp="1"/>
+          </p:cNvSpPr>
+          <p:nvPr>
+            <p:ph type="title" idx="101"/>
           </p:nvPr>
         </p:nvSpPr>
         <p:spPr/>
@@ -5750,7 +5821,7 @@
           <a:lstStyle/>
           <a:p>
             <a:r>
-              <a:t>4. 교재 5.3 24시 초과 시각</a:t>
+              <a:t>교재 5.3 24시 초과 시각</a:t>
             </a:r>
           </a:p>
         </p:txBody>
@@ -5770,88 +5841,22 @@
           <a:bodyPr/>
           <a:lstStyle/>
           <a:p>
-            <a:pPr/>
-            <a:r>
-              <a:t>arrival_time은 HH:MM:SS 문자열 — 그대로 파싱하면 실패</a:t>
-            </a:r>
-          </a:p>
-          <a:p>
-            <a:pPr/>
-            <a:r>
-              <a:t>하남 GTFS의 시 최댓값은 30 — 새벽 6시를 의미</a:t>
-            </a:r>
-          </a:p>
-          <a:p>
-            <a:pPr/>
-            <a:r>
-              <a:t>24시 미만으로 적을 때의 문제</a:t>
-            </a:r>
-          </a:p>
-          <a:p>
-            <a:pPr lvl="1"/>
-            <a:r>
-              <a:t>23:50 출발, 00:20 도착이면 도착이 출발보다 이른 시각</a:t>
-            </a:r>
-          </a:p>
-          <a:p>
-            <a:pPr lvl="1"/>
-            <a:r>
-              <a:t>그날 밤차인지 다음날 첫차인지 구분 불가</a:t>
-            </a:r>
-          </a:p>
-          <a:p>
-            <a:pPr/>
-            <a:r>
-              <a:t>24:20:00 표기의 효과: 시각 증가 유지, 운행일은 출발일로 고정</a:t>
-            </a:r>
-          </a:p>
-        </p:txBody>
-      </p:sp>
-      <p:sp>
-        <p:nvSpPr>
-          <p:cNvPr id="25" name="Slide Number Placeholder 0"/>
-          <p:cNvSpPr>
-            <a:spLocks noGrp="1"/>
-          </p:cNvSpPr>
-          <p:nvPr>
-            <p:ph type="sldNum" sz="quarter" idx="4294967295"/>
-          </p:nvPr>
-        </p:nvSpPr>
-        <p:spPr>
-          <a:xfrm>
-            <a:off x="10591495" y="6355080"/>
-            <a:ext cx="914400" cy="274320"/>
-          </a:xfrm>
-          <a:prstGeom prst="rect">
-            <a:avLst/>
-          </a:prstGeom>
-          <a:extLst>
-            <a:ext uri="{C572A759-6A51-4108-AA02-DFA0A04FC94B}">
-              <ma14:wrappingTextBoxFlag xmlns:ma14="http://schemas.microsoft.com/office/mac/drawingml/2011/main" val="0"/>
-            </a:ext>
-          </a:extLst>
-        </p:spPr>
-        <p:txBody>
-          <a:bodyPr/>
-          <a:lstStyle>
-            <a:lvl1pPr>
-              <a:defRPr sz="1000">
+            <a:pPr>
+              <a:spcAft>
+                <a:spcPts val="1000"/>
+              </a:spcAft>
+            </a:pPr>
+            <a:r>
+              <a:rPr>
                 <a:solidFill>
                   <a:srgbClr val="AFAFAF"/>
                 </a:solidFill>
-                <a:latin typeface="Pretendard Medium"/>
-                <a:ea typeface="Pretendard Medium"/>
-                <a:cs typeface="Pretendard Medium"/>
-              </a:defRPr>
-            </a:lvl1pPr>
-          </a:lstStyle>
-          <a:p>
-            <a:pPr algn="r"/>
-            <a:fld id="{F7021451-1387-4CA6-816F-3879F97B5CBC}" type="slidenum">
-              <a:rPr b="0" lang="en-US"/>
-              <a:t>1004</a:t>
-            </a:fld>
-            <a:endParaRPr lang="en-US"/>
+              </a:rPr>
+              <a:t>4.1  </a:t>
+            </a:r>
+            <a:r>
+              <a:t>30시가 나오는 이유</a:t>
+            </a:r>
           </a:p>
         </p:txBody>
       </p:sp>
@@ -5875,12 +5880,12 @@
       <p:grpSpPr/>
       <p:sp>
         <p:nvSpPr>
-          <p:cNvPr id="2" name="Text Placeholder 1"/>
-          <p:cNvSpPr>
-            <a:spLocks noGrp="1"/>
-          </p:cNvSpPr>
-          <p:nvPr>
-            <p:ph type="body" idx="100"/>
+          <p:cNvPr id="2" name="Title 1"/>
+          <p:cNvSpPr>
+            <a:spLocks noGrp="1"/>
+          </p:cNvSpPr>
+          <p:nvPr>
+            <p:ph type="title" idx="100"/>
           </p:nvPr>
         </p:nvSpPr>
         <p:spPr/>
@@ -5889,19 +5894,19 @@
           <a:lstStyle/>
           <a:p>
             <a:r>
-              <a:t>05</a:t>
-            </a:r>
-          </a:p>
-        </p:txBody>
-      </p:sp>
-      <p:sp>
-        <p:nvSpPr>
-          <p:cNvPr id="3" name="Title 2"/>
-          <p:cNvSpPr>
-            <a:spLocks noGrp="1"/>
-          </p:cNvSpPr>
-          <p:nvPr>
-            <p:ph type="title" idx="101"/>
+              <a:t>4.1 30시가 나오는 이유</a:t>
+            </a:r>
+          </a:p>
+        </p:txBody>
+      </p:sp>
+      <p:sp>
+        <p:nvSpPr>
+          <p:cNvPr id="3" name="Text Placeholder 2"/>
+          <p:cNvSpPr>
+            <a:spLocks noGrp="1"/>
+          </p:cNvSpPr>
+          <p:nvPr>
+            <p:ph type="body" idx="101"/>
           </p:nvPr>
         </p:nvSpPr>
         <p:spPr/>
@@ -5910,7 +5915,7 @@
           <a:lstStyle/>
           <a:p>
             <a:r>
-              <a:t>교재 5.4–5.5 지도와 경계 절단</a:t>
+              <a:t>4. 교재 5.3 24시 초과 시각</a:t>
             </a:r>
           </a:p>
         </p:txBody>
@@ -5930,40 +5935,88 @@
           <a:bodyPr/>
           <a:lstStyle/>
           <a:p>
-            <a:pPr>
-              <a:spcAft>
-                <a:spcPts val="1000"/>
-              </a:spcAft>
-            </a:pPr>
-            <a:r>
-              <a:rPr>
+            <a:pPr/>
+            <a:r>
+              <a:t>arrival_time은 HH:MM:SS 문자열 — 그대로 파싱하면 실패</a:t>
+            </a:r>
+          </a:p>
+          <a:p>
+            <a:pPr/>
+            <a:r>
+              <a:t>하남 GTFS의 시 최댓값은 30 — 새벽 6시를 의미</a:t>
+            </a:r>
+          </a:p>
+          <a:p>
+            <a:pPr/>
+            <a:r>
+              <a:t>24시 미만으로 적을 때의 문제</a:t>
+            </a:r>
+          </a:p>
+          <a:p>
+            <a:pPr lvl="1"/>
+            <a:r>
+              <a:t>23:50 출발, 00:20 도착이면 도착이 출발보다 이른 시각</a:t>
+            </a:r>
+          </a:p>
+          <a:p>
+            <a:pPr lvl="1"/>
+            <a:r>
+              <a:t>그날 밤차인지 다음날 첫차인지 구분 불가</a:t>
+            </a:r>
+          </a:p>
+          <a:p>
+            <a:pPr/>
+            <a:r>
+              <a:t>24:20:00 표기의 효과: 시각 증가 유지, 운행일은 출발일로 고정</a:t>
+            </a:r>
+          </a:p>
+        </p:txBody>
+      </p:sp>
+      <p:sp>
+        <p:nvSpPr>
+          <p:cNvPr id="25" name="Slide Number Placeholder 0"/>
+          <p:cNvSpPr>
+            <a:spLocks noGrp="1"/>
+          </p:cNvSpPr>
+          <p:nvPr>
+            <p:ph type="sldNum" sz="quarter" idx="4294967295"/>
+          </p:nvPr>
+        </p:nvSpPr>
+        <p:spPr>
+          <a:xfrm>
+            <a:off x="10591495" y="6355080"/>
+            <a:ext cx="914400" cy="274320"/>
+          </a:xfrm>
+          <a:prstGeom prst="rect">
+            <a:avLst/>
+          </a:prstGeom>
+          <a:extLst>
+            <a:ext uri="{C572A759-6A51-4108-AA02-DFA0A04FC94B}">
+              <ma14:wrappingTextBoxFlag xmlns:ma14="http://schemas.microsoft.com/office/mac/drawingml/2011/main" val="0"/>
+            </a:ext>
+          </a:extLst>
+        </p:spPr>
+        <p:txBody>
+          <a:bodyPr/>
+          <a:lstStyle>
+            <a:lvl1pPr>
+              <a:defRPr sz="1000">
                 <a:solidFill>
                   <a:srgbClr val="AFAFAF"/>
                 </a:solidFill>
-              </a:rPr>
-              <a:t>5.1  </a:t>
-            </a:r>
-            <a:r>
-              <a:t>정류장 분포</a:t>
-            </a:r>
-          </a:p>
-          <a:p>
-            <a:pPr>
-              <a:spcAft>
-                <a:spcPts val="1000"/>
-              </a:spcAft>
-            </a:pPr>
-            <a:r>
-              <a:rPr>
-                <a:solidFill>
-                  <a:srgbClr val="AFAFAF"/>
-                </a:solidFill>
-              </a:rPr>
-              <a:t>5.2  </a:t>
-            </a:r>
-            <a:r>
-              <a:t>노선 단위 절단</a:t>
-            </a:r>
+                <a:latin typeface="Pretendard Medium"/>
+                <a:ea typeface="Pretendard Medium"/>
+                <a:cs typeface="Pretendard Medium"/>
+              </a:defRPr>
+            </a:lvl1pPr>
+          </a:lstStyle>
+          <a:p>
+            <a:pPr algn="r"/>
+            <a:fld id="{F7021451-1387-4CA6-816F-3879F97B5CBC}" type="slidenum">
+              <a:rPr b="0" lang="en-US"/>
+              <a:t>1004</a:t>
+            </a:fld>
+            <a:endParaRPr lang="en-US"/>
           </a:p>
         </p:txBody>
       </p:sp>
@@ -5976,6 +6029,118 @@
 </file>
 
 <file path=ppt/slides/slide14.xml><?xml version="1.0" encoding="utf-8"?>
+<p:sld xmlns:a="http://schemas.openxmlformats.org/drawingml/2006/main" xmlns:p="http://schemas.openxmlformats.org/presentationml/2006/main" xmlns:r="http://schemas.openxmlformats.org/officeDocument/2006/relationships">
+  <p:cSld>
+    <p:spTree>
+      <p:nvGrpSpPr>
+        <p:cNvPr id="1" name=""/>
+        <p:cNvGrpSpPr/>
+        <p:nvPr/>
+      </p:nvGrpSpPr>
+      <p:grpSpPr/>
+      <p:sp>
+        <p:nvSpPr>
+          <p:cNvPr id="2" name="Text Placeholder 1"/>
+          <p:cNvSpPr>
+            <a:spLocks noGrp="1"/>
+          </p:cNvSpPr>
+          <p:nvPr>
+            <p:ph type="body" idx="100"/>
+          </p:nvPr>
+        </p:nvSpPr>
+        <p:spPr/>
+        <p:txBody>
+          <a:bodyPr/>
+          <a:lstStyle/>
+          <a:p>
+            <a:r>
+              <a:t>05</a:t>
+            </a:r>
+          </a:p>
+        </p:txBody>
+      </p:sp>
+      <p:sp>
+        <p:nvSpPr>
+          <p:cNvPr id="3" name="Title 2"/>
+          <p:cNvSpPr>
+            <a:spLocks noGrp="1"/>
+          </p:cNvSpPr>
+          <p:nvPr>
+            <p:ph type="title" idx="101"/>
+          </p:nvPr>
+        </p:nvSpPr>
+        <p:spPr/>
+        <p:txBody>
+          <a:bodyPr/>
+          <a:lstStyle/>
+          <a:p>
+            <a:r>
+              <a:t>교재 5.4–5.5 지도와 경계 절단</a:t>
+            </a:r>
+          </a:p>
+        </p:txBody>
+      </p:sp>
+      <p:sp>
+        <p:nvSpPr>
+          <p:cNvPr id="4" name="Text Placeholder 3"/>
+          <p:cNvSpPr>
+            <a:spLocks noGrp="1"/>
+          </p:cNvSpPr>
+          <p:nvPr>
+            <p:ph type="body" idx="102"/>
+          </p:nvPr>
+        </p:nvSpPr>
+        <p:spPr/>
+        <p:txBody>
+          <a:bodyPr/>
+          <a:lstStyle/>
+          <a:p>
+            <a:pPr>
+              <a:spcAft>
+                <a:spcPts val="1000"/>
+              </a:spcAft>
+            </a:pPr>
+            <a:r>
+              <a:rPr>
+                <a:solidFill>
+                  <a:srgbClr val="AFAFAF"/>
+                </a:solidFill>
+              </a:rPr>
+              <a:t>5.1  </a:t>
+            </a:r>
+            <a:r>
+              <a:t>정류장 분포</a:t>
+            </a:r>
+          </a:p>
+          <a:p>
+            <a:pPr>
+              <a:spcAft>
+                <a:spcPts val="1000"/>
+              </a:spcAft>
+            </a:pPr>
+            <a:r>
+              <a:rPr>
+                <a:solidFill>
+                  <a:srgbClr val="AFAFAF"/>
+                </a:solidFill>
+              </a:rPr>
+              <a:t>5.2  </a:t>
+            </a:r>
+            <a:r>
+              <a:t>노선 단위 절단</a:t>
+            </a:r>
+          </a:p>
+        </p:txBody>
+      </p:sp>
+    </p:spTree>
+  </p:cSld>
+  <p:clrMapOvr>
+    <a:masterClrMapping/>
+  </p:clrMapOvr>
+</p:sld>
+</file>
+
+<file path=ppt/slides/slide15.xml><?xml version="1.0" encoding="utf-8"?>
 <p:sld xmlns:a="http://schemas.openxmlformats.org/drawingml/2006/main" xmlns:p="http://schemas.openxmlformats.org/presentationml/2006/main" xmlns:r="http://schemas.openxmlformats.org/officeDocument/2006/relationships">
   <p:cSld>
     <p:spTree>
@@ -6162,7 +6327,7 @@
 </p:sld>
 </file>
 
-<file path=ppt/slides/slide15.xml><?xml version="1.0" encoding="utf-8"?>
+<file path=ppt/slides/slide16.xml><?xml version="1.0" encoding="utf-8"?>
 <p:sld xmlns:a="http://schemas.openxmlformats.org/drawingml/2006/main" xmlns:p="http://schemas.openxmlformats.org/presentationml/2006/main" xmlns:r="http://schemas.openxmlformats.org/officeDocument/2006/relationships">
   <p:cSld>
     <p:spTree>
@@ -6311,118 +6476,6 @@
               <a:t>1004</a:t>
             </a:fld>
             <a:endParaRPr lang="en-US"/>
-          </a:p>
-        </p:txBody>
-      </p:sp>
-    </p:spTree>
-  </p:cSld>
-  <p:clrMapOvr>
-    <a:masterClrMapping/>
-  </p:clrMapOvr>
-</p:sld>
-</file>
-
-<file path=ppt/slides/slide16.xml><?xml version="1.0" encoding="utf-8"?>
-<p:sld xmlns:a="http://schemas.openxmlformats.org/drawingml/2006/main" xmlns:p="http://schemas.openxmlformats.org/presentationml/2006/main" xmlns:r="http://schemas.openxmlformats.org/officeDocument/2006/relationships">
-  <p:cSld>
-    <p:spTree>
-      <p:nvGrpSpPr>
-        <p:cNvPr id="1" name=""/>
-        <p:cNvGrpSpPr/>
-        <p:nvPr/>
-      </p:nvGrpSpPr>
-      <p:grpSpPr/>
-      <p:sp>
-        <p:nvSpPr>
-          <p:cNvPr id="2" name="Text Placeholder 1"/>
-          <p:cNvSpPr>
-            <a:spLocks noGrp="1"/>
-          </p:cNvSpPr>
-          <p:nvPr>
-            <p:ph type="body" idx="100"/>
-          </p:nvPr>
-        </p:nvSpPr>
-        <p:spPr/>
-        <p:txBody>
-          <a:bodyPr/>
-          <a:lstStyle/>
-          <a:p>
-            <a:r>
-              <a:t>06</a:t>
-            </a:r>
-          </a:p>
-        </p:txBody>
-      </p:sp>
-      <p:sp>
-        <p:nvSpPr>
-          <p:cNvPr id="3" name="Title 2"/>
-          <p:cNvSpPr>
-            <a:spLocks noGrp="1"/>
-          </p:cNvSpPr>
-          <p:nvPr>
-            <p:ph type="title" idx="101"/>
-          </p:nvPr>
-        </p:nvSpPr>
-        <p:spPr/>
-        <p:txBody>
-          <a:bodyPr/>
-          <a:lstStyle/>
-          <a:p>
-            <a:r>
-              <a:t>교재 5.6 실습과 정리</a:t>
-            </a:r>
-          </a:p>
-        </p:txBody>
-      </p:sp>
-      <p:sp>
-        <p:nvSpPr>
-          <p:cNvPr id="4" name="Text Placeholder 3"/>
-          <p:cNvSpPr>
-            <a:spLocks noGrp="1"/>
-          </p:cNvSpPr>
-          <p:nvPr>
-            <p:ph type="body" idx="102"/>
-          </p:nvPr>
-        </p:nvSpPr>
-        <p:spPr/>
-        <p:txBody>
-          <a:bodyPr/>
-          <a:lstStyle/>
-          <a:p>
-            <a:pPr>
-              <a:spcAft>
-                <a:spcPts val="1000"/>
-              </a:spcAft>
-            </a:pPr>
-            <a:r>
-              <a:rPr>
-                <a:solidFill>
-                  <a:srgbClr val="AFAFAF"/>
-                </a:solidFill>
-              </a:rPr>
-              <a:t>6.1  </a:t>
-            </a:r>
-            <a:r>
-              <a:t>오늘의 정리</a:t>
-            </a:r>
-          </a:p>
-          <a:p>
-            <a:pPr>
-              <a:spcAft>
-                <a:spcPts val="1000"/>
-              </a:spcAft>
-            </a:pPr>
-            <a:r>
-              <a:rPr>
-                <a:solidFill>
-                  <a:srgbClr val="AFAFAF"/>
-                </a:solidFill>
-              </a:rPr>
-              <a:t>6.2  </a:t>
-            </a:r>
-            <a:r>
-              <a:t>연습과 다음 장</a:t>
-            </a:r>
           </a:p>
         </p:txBody>
       </p:sp>
@@ -6446,12 +6499,12 @@
       <p:grpSpPr/>
       <p:sp>
         <p:nvSpPr>
-          <p:cNvPr id="2" name="Title 1"/>
-          <p:cNvSpPr>
-            <a:spLocks noGrp="1"/>
-          </p:cNvSpPr>
-          <p:nvPr>
-            <p:ph type="title" idx="100"/>
+          <p:cNvPr id="2" name="Text Placeholder 1"/>
+          <p:cNvSpPr>
+            <a:spLocks noGrp="1"/>
+          </p:cNvSpPr>
+          <p:nvPr>
+            <p:ph type="body" idx="100"/>
           </p:nvPr>
         </p:nvSpPr>
         <p:spPr/>
@@ -6460,19 +6513,19 @@
           <a:lstStyle/>
           <a:p>
             <a:r>
-              <a:t>6.1 오늘의 정리</a:t>
-            </a:r>
-          </a:p>
-        </p:txBody>
-      </p:sp>
-      <p:sp>
-        <p:nvSpPr>
-          <p:cNvPr id="3" name="Text Placeholder 2"/>
-          <p:cNvSpPr>
-            <a:spLocks noGrp="1"/>
-          </p:cNvSpPr>
-          <p:nvPr>
-            <p:ph type="body" idx="101"/>
+              <a:t>06</a:t>
+            </a:r>
+          </a:p>
+        </p:txBody>
+      </p:sp>
+      <p:sp>
+        <p:nvSpPr>
+          <p:cNvPr id="3" name="Title 2"/>
+          <p:cNvSpPr>
+            <a:spLocks noGrp="1"/>
+          </p:cNvSpPr>
+          <p:nvPr>
+            <p:ph type="title" idx="101"/>
           </p:nvPr>
         </p:nvSpPr>
         <p:spPr/>
@@ -6481,7 +6534,7 @@
           <a:lstStyle/>
           <a:p>
             <a:r>
-              <a:t>6. 교재 5.6 실습과 정리</a:t>
+              <a:t>교재 5.6 실습과 정리</a:t>
             </a:r>
           </a:p>
         </p:txBody>
@@ -6501,82 +6554,40 @@
           <a:bodyPr/>
           <a:lstStyle/>
           <a:p>
-            <a:pPr/>
-            <a:r>
-              <a:t>표 연결: routes에서 trips, stop_times, stops 순서</a:t>
-            </a:r>
-          </a:p>
-          <a:p>
-            <a:pPr lvl="1"/>
-            <a:r>
-              <a:t>노선과 운행은 다름 — 340번은 노선 하나, 하루 수십 회 운행</a:t>
-            </a:r>
-          </a:p>
-          <a:p>
-            <a:pPr/>
-            <a:r>
-              <a:t>한국 route_type은 TAGO 코드 — 0은 시내버스이고 트램이 아님</a:t>
-            </a:r>
-          </a:p>
-          <a:p>
-            <a:pPr/>
-            <a:r>
-              <a:t>시각은 24시를 넘음 — 25:30:00은 다음 날 새벽이고 같은 운행일</a:t>
-            </a:r>
-          </a:p>
-          <a:p>
-            <a:pPr/>
-            <a:r>
-              <a:t>경계 절단은 정류장이 아니라 노선 단위</a:t>
-            </a:r>
-          </a:p>
-        </p:txBody>
-      </p:sp>
-      <p:sp>
-        <p:nvSpPr>
-          <p:cNvPr id="25" name="Slide Number Placeholder 0"/>
-          <p:cNvSpPr>
-            <a:spLocks noGrp="1"/>
-          </p:cNvSpPr>
-          <p:nvPr>
-            <p:ph type="sldNum" sz="quarter" idx="4294967295"/>
-          </p:nvPr>
-        </p:nvSpPr>
-        <p:spPr>
-          <a:xfrm>
-            <a:off x="10591495" y="6355080"/>
-            <a:ext cx="914400" cy="274320"/>
-          </a:xfrm>
-          <a:prstGeom prst="rect">
-            <a:avLst/>
-          </a:prstGeom>
-          <a:extLst>
-            <a:ext uri="{C572A759-6A51-4108-AA02-DFA0A04FC94B}">
-              <ma14:wrappingTextBoxFlag xmlns:ma14="http://schemas.microsoft.com/office/mac/drawingml/2011/main" val="0"/>
-            </a:ext>
-          </a:extLst>
-        </p:spPr>
-        <p:txBody>
-          <a:bodyPr/>
-          <a:lstStyle>
-            <a:lvl1pPr>
-              <a:defRPr sz="1000">
+            <a:pPr>
+              <a:spcAft>
+                <a:spcPts val="1000"/>
+              </a:spcAft>
+            </a:pPr>
+            <a:r>
+              <a:rPr>
                 <a:solidFill>
                   <a:srgbClr val="AFAFAF"/>
                 </a:solidFill>
-                <a:latin typeface="Pretendard Medium"/>
-                <a:ea typeface="Pretendard Medium"/>
-                <a:cs typeface="Pretendard Medium"/>
-              </a:defRPr>
-            </a:lvl1pPr>
-          </a:lstStyle>
-          <a:p>
-            <a:pPr algn="r"/>
-            <a:fld id="{F7021451-1387-4CA6-816F-3879F97B5CBC}" type="slidenum">
-              <a:rPr b="0" lang="en-US"/>
-              <a:t>1004</a:t>
-            </a:fld>
-            <a:endParaRPr lang="en-US"/>
+              </a:rPr>
+              <a:t>6.1  </a:t>
+            </a:r>
+            <a:r>
+              <a:t>오늘의 정리</a:t>
+            </a:r>
+          </a:p>
+          <a:p>
+            <a:pPr>
+              <a:spcAft>
+                <a:spcPts val="1000"/>
+              </a:spcAft>
+            </a:pPr>
+            <a:r>
+              <a:rPr>
+                <a:solidFill>
+                  <a:srgbClr val="AFAFAF"/>
+                </a:solidFill>
+              </a:rPr>
+              <a:t>6.2  </a:t>
+            </a:r>
+            <a:r>
+              <a:t>연습과 다음 장</a:t>
+            </a:r>
           </a:p>
         </p:txBody>
       </p:sp>
@@ -6614,7 +6625,7 @@
           <a:lstStyle/>
           <a:p>
             <a:r>
-              <a:t>6.2 연습과 다음 장</a:t>
+              <a:t>6.1 오늘의 정리</a:t>
             </a:r>
           </a:p>
         </p:txBody>
@@ -6657,37 +6668,31 @@
           <a:p>
             <a:pPr/>
             <a:r>
-              <a:t>연습 5.1 ★ — 첫차와 막차 시각, 24시 초과 표기 처리</a:t>
+              <a:t>표 연결: routes에서 trips, stop_times, stops 순서</a:t>
             </a:r>
           </a:p>
           <a:p>
             <a:pPr lvl="1"/>
             <a:r>
-              <a:t>산출물: 첫차 시각, 막차 시각, 처리 방식 한 문장</a:t>
+              <a:t>노선과 운행은 다름 — 340번은 노선 하나, 하루 수십 회 운행</a:t>
             </a:r>
           </a:p>
           <a:p>
             <a:pPr/>
             <a:r>
-              <a:t>연습 5.2 ★★ — 시간대별 운행 편수 히스토그램</a:t>
-            </a:r>
-          </a:p>
-          <a:p>
-            <a:pPr lvl="1"/>
-            <a:r>
-              <a:t>산출물: 히스토그램 1장, 첨두 시간대와 심야 운행 유무 2~3줄</a:t>
+              <a:t>한국 route_type은 TAGO 코드 — 0은 시내버스이고 트램이 아님</a:t>
             </a:r>
           </a:p>
           <a:p>
             <a:pPr/>
             <a:r>
-              <a:t>연습 5.3 ★★★ — 노선별 정류장 순서의 종류 수</a:t>
+              <a:t>시각은 24시를 넘음 — 25:30:00은 다음 날 새벽이고 같은 운행일</a:t>
             </a:r>
           </a:p>
           <a:p>
             <a:pPr/>
             <a:r>
-              <a:t>다음 장: 6장 RAPTOR 직접 구현 — 직접 구현 세 개 중 두 번째</a:t>
+              <a:t>경계 절단은 정류장이 아니라 노선 단위</a:t>
             </a:r>
           </a:p>
         </p:txBody>
@@ -6774,7 +6779,7 @@
           <a:lstStyle/>
           <a:p>
             <a:r>
-              <a:t>다음 주에 봅니다</a:t>
+              <a:t>6.2 연습과 다음 장</a:t>
             </a:r>
           </a:p>
         </p:txBody>
@@ -6795,7 +6800,7 @@
           <a:lstStyle/>
           <a:p>
             <a:r>
-              <a:t>교재 6장 — RAPTOR 직접 구현</a:t>
+              <a:t>6. 교재 5.6 실습과 정리</a:t>
             </a:r>
           </a:p>
         </p:txBody>
@@ -6815,9 +6820,88 @@
           <a:bodyPr/>
           <a:lstStyle/>
           <a:p>
-            <a:r>
-              <a:t>jihoyeo@gachon.ac.kr · AI공학관 210호</a:t>
-            </a:r>
+            <a:pPr/>
+            <a:r>
+              <a:t>연습 5.1 ★ — 첫차와 막차 시각, 24시 초과 표기 처리</a:t>
+            </a:r>
+          </a:p>
+          <a:p>
+            <a:pPr lvl="1"/>
+            <a:r>
+              <a:t>산출물: 첫차 시각, 막차 시각, 처리 방식 한 문장</a:t>
+            </a:r>
+          </a:p>
+          <a:p>
+            <a:pPr/>
+            <a:r>
+              <a:t>연습 5.2 ★★ — 시간대별 운행 편수 히스토그램</a:t>
+            </a:r>
+          </a:p>
+          <a:p>
+            <a:pPr lvl="1"/>
+            <a:r>
+              <a:t>산출물: 히스토그램 1장, 첨두 시간대와 심야 운행 유무 2~3줄</a:t>
+            </a:r>
+          </a:p>
+          <a:p>
+            <a:pPr/>
+            <a:r>
+              <a:t>연습 5.3 ★★★ — 노선별 정류장 순서의 종류 수</a:t>
+            </a:r>
+          </a:p>
+          <a:p>
+            <a:pPr/>
+            <a:r>
+              <a:t>다음 장: 6장 RAPTOR 직접 구현 — 직접 구현 세 개 중 두 번째</a:t>
+            </a:r>
+          </a:p>
+        </p:txBody>
+      </p:sp>
+      <p:sp>
+        <p:nvSpPr>
+          <p:cNvPr id="25" name="Slide Number Placeholder 0"/>
+          <p:cNvSpPr>
+            <a:spLocks noGrp="1"/>
+          </p:cNvSpPr>
+          <p:nvPr>
+            <p:ph type="sldNum" sz="quarter" idx="4294967295"/>
+          </p:nvPr>
+        </p:nvSpPr>
+        <p:spPr>
+          <a:xfrm>
+            <a:off x="10591495" y="6355080"/>
+            <a:ext cx="914400" cy="274320"/>
+          </a:xfrm>
+          <a:prstGeom prst="rect">
+            <a:avLst/>
+          </a:prstGeom>
+          <a:extLst>
+            <a:ext uri="{C572A759-6A51-4108-AA02-DFA0A04FC94B}">
+              <ma14:wrappingTextBoxFlag xmlns:ma14="http://schemas.microsoft.com/office/mac/drawingml/2011/main" val="0"/>
+            </a:ext>
+          </a:extLst>
+        </p:spPr>
+        <p:txBody>
+          <a:bodyPr/>
+          <a:lstStyle>
+            <a:lvl1pPr>
+              <a:defRPr sz="1000">
+                <a:solidFill>
+                  <a:srgbClr val="AFAFAF"/>
+                </a:solidFill>
+                <a:latin typeface="Pretendard Medium"/>
+                <a:ea typeface="Pretendard Medium"/>
+                <a:cs typeface="Pretendard Medium"/>
+              </a:defRPr>
+            </a:lvl1pPr>
+          </a:lstStyle>
+          <a:p>
+            <a:pPr algn="r"/>
+            <a:fld id="{F7021451-1387-4CA6-816F-3879F97B5CBC}" type="slidenum">
+              <a:rPr b="0" lang="en-US"/>
+              <a:t>1004</a:t>
+            </a:fld>
+            <a:endParaRPr lang="en-US"/>
           </a:p>
         </p:txBody>
       </p:sp>
@@ -6989,7 +7073,7 @@
                           </a:solidFill>
                           <a:latin typeface="Pretendard Medium"/>
                         </a:rPr>
-                        <a:t>1.1 버스는 아무 때나 출발하지 않습니다  ·  1.2 학습 목표</a:t>
+                        <a:t>1.1 버스는 아무 때나 출발하지 않습니다  ·  1.2 학습 목표  ·  1.3 교재와 실습을 여는 곳</a:t>
                       </a:r>
                     </a:p>
                   </a:txBody>
@@ -7624,6 +7708,87 @@
 </p:sld>
 </file>
 
+<file path=ppt/slides/slide20.xml><?xml version="1.0" encoding="utf-8"?>
+<p:sld xmlns:a="http://schemas.openxmlformats.org/drawingml/2006/main" xmlns:p="http://schemas.openxmlformats.org/presentationml/2006/main" xmlns:r="http://schemas.openxmlformats.org/officeDocument/2006/relationships">
+  <p:cSld>
+    <p:spTree>
+      <p:nvGrpSpPr>
+        <p:cNvPr id="1" name=""/>
+        <p:cNvGrpSpPr/>
+        <p:nvPr/>
+      </p:nvGrpSpPr>
+      <p:grpSpPr/>
+      <p:sp>
+        <p:nvSpPr>
+          <p:cNvPr id="2" name="Title 1"/>
+          <p:cNvSpPr>
+            <a:spLocks noGrp="1"/>
+          </p:cNvSpPr>
+          <p:nvPr>
+            <p:ph type="title" idx="100"/>
+          </p:nvPr>
+        </p:nvSpPr>
+        <p:spPr/>
+        <p:txBody>
+          <a:bodyPr/>
+          <a:lstStyle/>
+          <a:p>
+            <a:r>
+              <a:t>다음 주에 봅니다</a:t>
+            </a:r>
+          </a:p>
+        </p:txBody>
+      </p:sp>
+      <p:sp>
+        <p:nvSpPr>
+          <p:cNvPr id="3" name="Text Placeholder 2"/>
+          <p:cNvSpPr>
+            <a:spLocks noGrp="1"/>
+          </p:cNvSpPr>
+          <p:nvPr>
+            <p:ph type="body" idx="101"/>
+          </p:nvPr>
+        </p:nvSpPr>
+        <p:spPr/>
+        <p:txBody>
+          <a:bodyPr/>
+          <a:lstStyle/>
+          <a:p>
+            <a:r>
+              <a:t>교재 6장 — RAPTOR 직접 구현</a:t>
+            </a:r>
+          </a:p>
+        </p:txBody>
+      </p:sp>
+      <p:sp>
+        <p:nvSpPr>
+          <p:cNvPr id="4" name="Text Placeholder 3"/>
+          <p:cNvSpPr>
+            <a:spLocks noGrp="1"/>
+          </p:cNvSpPr>
+          <p:nvPr>
+            <p:ph type="body" idx="102"/>
+          </p:nvPr>
+        </p:nvSpPr>
+        <p:spPr/>
+        <p:txBody>
+          <a:bodyPr/>
+          <a:lstStyle/>
+          <a:p>
+            <a:r>
+              <a:t>jihoyeo@gachon.ac.kr · AI공학관 210호</a:t>
+            </a:r>
+          </a:p>
+        </p:txBody>
+      </p:sp>
+    </p:spTree>
+  </p:cSld>
+  <p:clrMapOvr>
+    <a:masterClrMapping/>
+  </p:clrMapOvr>
+</p:sld>
+</file>
+
 <file path=ppt/slides/slide3.xml><?xml version="1.0" encoding="utf-8"?>
 <p:sld xmlns:a="http://schemas.openxmlformats.org/drawingml/2006/main" xmlns:p="http://schemas.openxmlformats.org/presentationml/2006/main" xmlns:r="http://schemas.openxmlformats.org/officeDocument/2006/relationships">
   <p:cSld>
@@ -7724,6 +7889,24 @@
             </a:r>
             <a:r>
               <a:t>학습 목표</a:t>
+            </a:r>
+          </a:p>
+          <a:p>
+            <a:pPr>
+              <a:spcAft>
+                <a:spcPts val="1000"/>
+              </a:spcAft>
+            </a:pPr>
+            <a:r>
+              <a:rPr>
+                <a:solidFill>
+                  <a:srgbClr val="AFAFAF"/>
+                </a:solidFill>
+              </a:rPr>
+              <a:t>1.3  </a:t>
+            </a:r>
+            <a:r>
+              <a:t>교재와 실습을 여는 곳</a:t>
             </a:r>
           </a:p>
         </p:txBody>
@@ -8044,12 +8227,12 @@
       <p:grpSpPr/>
       <p:sp>
         <p:nvSpPr>
-          <p:cNvPr id="2" name="Text Placeholder 1"/>
-          <p:cNvSpPr>
-            <a:spLocks noGrp="1"/>
-          </p:cNvSpPr>
-          <p:nvPr>
-            <p:ph type="body" idx="100"/>
+          <p:cNvPr id="2" name="Title 1"/>
+          <p:cNvSpPr>
+            <a:spLocks noGrp="1"/>
+          </p:cNvSpPr>
+          <p:nvPr>
+            <p:ph type="title" idx="100"/>
           </p:nvPr>
         </p:nvSpPr>
         <p:spPr/>
@@ -8058,19 +8241,19 @@
           <a:lstStyle/>
           <a:p>
             <a:r>
-              <a:t>02</a:t>
-            </a:r>
-          </a:p>
-        </p:txBody>
-      </p:sp>
-      <p:sp>
-        <p:nvSpPr>
-          <p:cNvPr id="3" name="Title 2"/>
-          <p:cNvSpPr>
-            <a:spLocks noGrp="1"/>
-          </p:cNvSpPr>
-          <p:nvPr>
-            <p:ph type="title" idx="101"/>
+              <a:t>1.3 교재와 실습을 여는 곳</a:t>
+            </a:r>
+          </a:p>
+        </p:txBody>
+      </p:sp>
+      <p:sp>
+        <p:nvSpPr>
+          <p:cNvPr id="3" name="Text Placeholder 2"/>
+          <p:cNvSpPr>
+            <a:spLocks noGrp="1"/>
+          </p:cNvSpPr>
+          <p:nvPr>
+            <p:ph type="body" idx="101"/>
           </p:nvPr>
         </p:nvSpPr>
         <p:spPr/>
@@ -8079,7 +8262,7 @@
           <a:lstStyle/>
           <a:p>
             <a:r>
-              <a:t>교재 5.1 표 다섯 개</a:t>
+              <a:t>1. 도입과 학습 목표</a:t>
             </a:r>
           </a:p>
         </p:txBody>
@@ -8099,40 +8282,335 @@
           <a:bodyPr/>
           <a:lstStyle/>
           <a:p>
-            <a:pPr>
-              <a:spcAft>
-                <a:spcPts val="1000"/>
-              </a:spcAft>
-            </a:pPr>
-            <a:r>
-              <a:rPr>
+            <a:pPr/>
+            <a:r>
+              <a:t>저장소: github.com/jihoyeo/mobility-simulation-book — blob/main 아래 경로</a:t>
+            </a:r>
+          </a:p>
+          <a:p>
+            <a:pPr/>
+            <a:r>
+              <a:t>노트북 실행: jupyter lab labs/ch05_gtfs.ipynb</a:t>
+            </a:r>
+          </a:p>
+          <a:p>
+            <a:pPr/>
+            <a:r>
+              <a:t>진행 순서: 슬라이드 개요 → 교재 본문 → 실습 노트북</a:t>
+            </a:r>
+          </a:p>
+        </p:txBody>
+      </p:sp>
+      <p:sp>
+        <p:nvSpPr>
+          <p:cNvPr id="5" name="Text Placeholder 4"/>
+          <p:cNvSpPr>
+            <a:spLocks noGrp="1"/>
+          </p:cNvSpPr>
+          <p:nvPr>
+            <p:ph type="body" idx="103"/>
+          </p:nvPr>
+        </p:nvSpPr>
+        <p:spPr/>
+        <p:txBody>
+          <a:bodyPr/>
+          <a:lstStyle/>
+          <a:p>
+            <a:r>
+              <a:t>표 1. 오늘 여는 파일과 경로</a:t>
+            </a:r>
+          </a:p>
+        </p:txBody>
+      </p:sp>
+      <p:graphicFrame>
+        <p:nvGraphicFramePr>
+          <p:cNvPr id="6" name="Table Placeholder 5"/>
+          <p:cNvGraphicFramePr>
+            <a:graphicFrameLocks noGrp="1"/>
+          </p:cNvGraphicFramePr>
+          <p:nvPr>
+            <p:ph type="tbl" idx="104"/>
+          </p:nvPr>
+        </p:nvGraphicFramePr>
+        <p:xfrm>
+          <a:off x="4937760" y="1828800"/>
+          <a:ext cx="6565392" cy="1676400"/>
+        </p:xfrm>
+        <a:graphic>
+          <a:graphicData uri="http://schemas.openxmlformats.org/drawingml/2006/table">
+            <a:tbl>
+              <a:tblPr firstRow="0" bandRow="0" firstCol="0" lastRow="0" lastCol="0" bandCol="0"/>
+              <a:tblGrid>
+                <a:gridCol w="3282696"/>
+                <a:gridCol w="3282696"/>
+              </a:tblGrid>
+              <a:tr h="406400">
+                <a:tc>
+                  <a:txBody>
+                    <a:bodyPr/>
+                    <a:lstStyle/>
+                    <a:p>
+                      <a:r>
+                        <a:rPr sz="1300" b="0">
+                          <a:solidFill>
+                            <a:srgbClr val="FFFFFF"/>
+                          </a:solidFill>
+                          <a:latin typeface="Pretendard Medium"/>
+                        </a:rPr>
+                        <a:t>자료</a:t>
+                      </a:r>
+                    </a:p>
+                  </a:txBody>
+                  <a:tcPr marL="101600" marR="101600" marT="76200" marB="76200" anchor="ctr">
+                    <a:solidFill>
+                      <a:srgbClr val="000000"/>
+                    </a:solidFill>
+                    <a:lnL w="0">
+                      <a:noFill/>
+                    </a:lnL>
+                    <a:lnR w="0">
+                      <a:noFill/>
+                    </a:lnR>
+                    <a:lnT w="0">
+                      <a:noFill/>
+                    </a:lnT>
+                    <a:lnB w="0">
+                      <a:noFill/>
+                    </a:lnB>
+                  </a:tcPr>
+                </a:tc>
+                <a:tc>
+                  <a:txBody>
+                    <a:bodyPr/>
+                    <a:lstStyle/>
+                    <a:p>
+                      <a:r>
+                        <a:rPr sz="1300" b="0">
+                          <a:solidFill>
+                            <a:srgbClr val="FFFFFF"/>
+                          </a:solidFill>
+                          <a:latin typeface="Pretendard Medium"/>
+                        </a:rPr>
+                        <a:t>경로</a:t>
+                      </a:r>
+                    </a:p>
+                  </a:txBody>
+                  <a:tcPr marL="101600" marR="101600" marT="76200" marB="76200" anchor="ctr">
+                    <a:solidFill>
+                      <a:srgbClr val="000000"/>
+                    </a:solidFill>
+                    <a:lnL w="0">
+                      <a:noFill/>
+                    </a:lnL>
+                    <a:lnR w="0">
+                      <a:noFill/>
+                    </a:lnR>
+                    <a:lnT w="0">
+                      <a:noFill/>
+                    </a:lnT>
+                    <a:lnB w="0">
+                      <a:noFill/>
+                    </a:lnB>
+                  </a:tcPr>
+                </a:tc>
+              </a:tr>
+              <a:tr h="635000">
+                <a:tc>
+                  <a:txBody>
+                    <a:bodyPr/>
+                    <a:lstStyle/>
+                    <a:p>
+                      <a:r>
+                        <a:rPr sz="1300" b="1">
+                          <a:solidFill>
+                            <a:srgbClr val="000000"/>
+                          </a:solidFill>
+                          <a:latin typeface="Pretendard"/>
+                        </a:rPr>
+                        <a:t>교재 원고</a:t>
+                      </a:r>
+                    </a:p>
+                  </a:txBody>
+                  <a:tcPr marL="101600" marR="101600" marT="101600" marB="101600" anchor="ctr">
+                    <a:solidFill>
+                      <a:srgbClr val="FFFFFF"/>
+                    </a:solidFill>
+                    <a:lnL w="0">
+                      <a:noFill/>
+                    </a:lnL>
+                    <a:lnR w="0">
+                      <a:noFill/>
+                    </a:lnR>
+                    <a:lnT w="0">
+                      <a:noFill/>
+                    </a:lnT>
+                    <a:lnB w="9525">
+                      <a:solidFill>
+                        <a:srgbClr val="E2E2E2"/>
+                      </a:solidFill>
+                    </a:lnB>
+                  </a:tcPr>
+                </a:tc>
+                <a:tc>
+                  <a:txBody>
+                    <a:bodyPr/>
+                    <a:lstStyle/>
+                    <a:p>
+                      <a:r>
+                        <a:rPr sz="1300" b="0">
+                          <a:solidFill>
+                            <a:srgbClr val="5E5E5E"/>
+                          </a:solidFill>
+                          <a:latin typeface="Pretendard Medium"/>
+                        </a:rPr>
+                        <a:t>ko/ch05_gtfs.md</a:t>
+                      </a:r>
+                    </a:p>
+                  </a:txBody>
+                  <a:tcPr marL="101600" marR="101600" marT="101600" marB="101600" anchor="ctr">
+                    <a:solidFill>
+                      <a:srgbClr val="FFFFFF"/>
+                    </a:solidFill>
+                    <a:lnL w="0">
+                      <a:noFill/>
+                    </a:lnL>
+                    <a:lnR w="0">
+                      <a:noFill/>
+                    </a:lnR>
+                    <a:lnT w="0">
+                      <a:noFill/>
+                    </a:lnT>
+                    <a:lnB w="9525">
+                      <a:solidFill>
+                        <a:srgbClr val="E2E2E2"/>
+                      </a:solidFill>
+                    </a:lnB>
+                  </a:tcPr>
+                </a:tc>
+              </a:tr>
+              <a:tr h="635000">
+                <a:tc>
+                  <a:txBody>
+                    <a:bodyPr/>
+                    <a:lstStyle/>
+                    <a:p>
+                      <a:r>
+                        <a:rPr sz="1300" b="1">
+                          <a:solidFill>
+                            <a:srgbClr val="000000"/>
+                          </a:solidFill>
+                          <a:latin typeface="Pretendard"/>
+                        </a:rPr>
+                        <a:t>실습 노트북</a:t>
+                      </a:r>
+                    </a:p>
+                  </a:txBody>
+                  <a:tcPr marL="101600" marR="101600" marT="101600" marB="101600" anchor="ctr">
+                    <a:solidFill>
+                      <a:srgbClr val="FFFFFF"/>
+                    </a:solidFill>
+                    <a:lnL w="0">
+                      <a:noFill/>
+                    </a:lnL>
+                    <a:lnR w="0">
+                      <a:noFill/>
+                    </a:lnR>
+                    <a:lnT w="0">
+                      <a:noFill/>
+                    </a:lnT>
+                    <a:lnB w="9525">
+                      <a:solidFill>
+                        <a:srgbClr val="E2E2E2"/>
+                      </a:solidFill>
+                    </a:lnB>
+                  </a:tcPr>
+                </a:tc>
+                <a:tc>
+                  <a:txBody>
+                    <a:bodyPr/>
+                    <a:lstStyle/>
+                    <a:p>
+                      <a:r>
+                        <a:rPr sz="1300" b="0">
+                          <a:solidFill>
+                            <a:srgbClr val="5E5E5E"/>
+                          </a:solidFill>
+                          <a:latin typeface="Pretendard Medium"/>
+                        </a:rPr>
+                        <a:t>labs/ch05_gtfs.ipynb</a:t>
+                      </a:r>
+                    </a:p>
+                  </a:txBody>
+                  <a:tcPr marL="101600" marR="101600" marT="101600" marB="101600" anchor="ctr">
+                    <a:solidFill>
+                      <a:srgbClr val="FFFFFF"/>
+                    </a:solidFill>
+                    <a:lnL w="0">
+                      <a:noFill/>
+                    </a:lnL>
+                    <a:lnR w="0">
+                      <a:noFill/>
+                    </a:lnR>
+                    <a:lnT w="0">
+                      <a:noFill/>
+                    </a:lnT>
+                    <a:lnB w="9525">
+                      <a:solidFill>
+                        <a:srgbClr val="E2E2E2"/>
+                      </a:solidFill>
+                    </a:lnB>
+                  </a:tcPr>
+                </a:tc>
+              </a:tr>
+            </a:tbl>
+          </a:graphicData>
+        </a:graphic>
+      </p:graphicFrame>
+      <p:sp>
+        <p:nvSpPr>
+          <p:cNvPr id="25" name="Slide Number Placeholder 0"/>
+          <p:cNvSpPr>
+            <a:spLocks noGrp="1"/>
+          </p:cNvSpPr>
+          <p:nvPr>
+            <p:ph type="sldNum" sz="quarter" idx="4294967295"/>
+          </p:nvPr>
+        </p:nvSpPr>
+        <p:spPr>
+          <a:xfrm>
+            <a:off x="10591495" y="6355080"/>
+            <a:ext cx="914400" cy="274320"/>
+          </a:xfrm>
+          <a:prstGeom prst="rect">
+            <a:avLst/>
+          </a:prstGeom>
+          <a:extLst>
+            <a:ext uri="{C572A759-6A51-4108-AA02-DFA0A04FC94B}">
+              <ma14:wrappingTextBoxFlag xmlns:ma14="http://schemas.microsoft.com/office/mac/drawingml/2011/main" val="0"/>
+            </a:ext>
+          </a:extLst>
+        </p:spPr>
+        <p:txBody>
+          <a:bodyPr/>
+          <a:lstStyle>
+            <a:lvl1pPr>
+              <a:defRPr sz="1000">
                 <a:solidFill>
                   <a:srgbClr val="AFAFAF"/>
                 </a:solidFill>
-              </a:rPr>
-              <a:t>2.1  </a:t>
-            </a:r>
-            <a:r>
-              <a:t>GTFS 다섯 개 표의 연결</a:t>
-            </a:r>
-          </a:p>
-          <a:p>
-            <a:pPr>
-              <a:spcAft>
-                <a:spcPts val="1000"/>
-              </a:spcAft>
-            </a:pPr>
-            <a:r>
-              <a:rPr>
-                <a:solidFill>
-                  <a:srgbClr val="AFAFAF"/>
-                </a:solidFill>
-              </a:rPr>
-              <a:t>2.2  </a:t>
-            </a:r>
-            <a:r>
-              <a:t>노선과 운행의 구분</a:t>
-            </a:r>
+                <a:latin typeface="Pretendard Medium"/>
+                <a:ea typeface="Pretendard Medium"/>
+                <a:cs typeface="Pretendard Medium"/>
+              </a:defRPr>
+            </a:lvl1pPr>
+          </a:lstStyle>
+          <a:p>
+            <a:pPr algn="r"/>
+            <a:fld id="{F7021451-1387-4CA6-816F-3879F97B5CBC}" type="slidenum">
+              <a:rPr b="0" lang="en-US"/>
+              <a:t>1008</a:t>
+            </a:fld>
+            <a:endParaRPr lang="en-US"/>
           </a:p>
         </p:txBody>
       </p:sp>
@@ -8156,12 +8634,12 @@
       <p:grpSpPr/>
       <p:sp>
         <p:nvSpPr>
-          <p:cNvPr id="2" name="Title 1"/>
-          <p:cNvSpPr>
-            <a:spLocks noGrp="1"/>
-          </p:cNvSpPr>
-          <p:nvPr>
-            <p:ph type="title" idx="100"/>
+          <p:cNvPr id="2" name="Text Placeholder 1"/>
+          <p:cNvSpPr>
+            <a:spLocks noGrp="1"/>
+          </p:cNvSpPr>
+          <p:nvPr>
+            <p:ph type="body" idx="100"/>
           </p:nvPr>
         </p:nvSpPr>
         <p:spPr/>
@@ -8170,19 +8648,19 @@
           <a:lstStyle/>
           <a:p>
             <a:r>
-              <a:t>2.1 GTFS 다섯 개 표의 연결</a:t>
-            </a:r>
-          </a:p>
-        </p:txBody>
-      </p:sp>
-      <p:sp>
-        <p:nvSpPr>
-          <p:cNvPr id="3" name="Text Placeholder 2"/>
-          <p:cNvSpPr>
-            <a:spLocks noGrp="1"/>
-          </p:cNvSpPr>
-          <p:nvPr>
-            <p:ph type="body" idx="101"/>
+              <a:t>02</a:t>
+            </a:r>
+          </a:p>
+        </p:txBody>
+      </p:sp>
+      <p:sp>
+        <p:nvSpPr>
+          <p:cNvPr id="3" name="Title 2"/>
+          <p:cNvSpPr>
+            <a:spLocks noGrp="1"/>
+          </p:cNvSpPr>
+          <p:nvPr>
+            <p:ph type="title" idx="101"/>
           </p:nvPr>
         </p:nvSpPr>
         <p:spPr/>
@@ -8191,7 +8669,7 @@
           <a:lstStyle/>
           <a:p>
             <a:r>
-              <a:t>2. 교재 5.1 표 다섯 개</a:t>
+              <a:t>교재 5.1 표 다섯 개</a:t>
             </a:r>
           </a:p>
         </p:txBody>
@@ -8211,8 +8689,120 @@
           <a:bodyPr/>
           <a:lstStyle/>
           <a:p>
-            <a:r>
-              <a:t>표 1. 이 과목에서 사용하는 GTFS 다섯 개 표와 연결 키</a:t>
+            <a:pPr>
+              <a:spcAft>
+                <a:spcPts val="1000"/>
+              </a:spcAft>
+            </a:pPr>
+            <a:r>
+              <a:rPr>
+                <a:solidFill>
+                  <a:srgbClr val="AFAFAF"/>
+                </a:solidFill>
+              </a:rPr>
+              <a:t>2.1  </a:t>
+            </a:r>
+            <a:r>
+              <a:t>GTFS 다섯 개 표의 연결</a:t>
+            </a:r>
+          </a:p>
+          <a:p>
+            <a:pPr>
+              <a:spcAft>
+                <a:spcPts val="1000"/>
+              </a:spcAft>
+            </a:pPr>
+            <a:r>
+              <a:rPr>
+                <a:solidFill>
+                  <a:srgbClr val="AFAFAF"/>
+                </a:solidFill>
+              </a:rPr>
+              <a:t>2.2  </a:t>
+            </a:r>
+            <a:r>
+              <a:t>노선과 운행의 구분</a:t>
+            </a:r>
+          </a:p>
+        </p:txBody>
+      </p:sp>
+    </p:spTree>
+  </p:cSld>
+  <p:clrMapOvr>
+    <a:masterClrMapping/>
+  </p:clrMapOvr>
+</p:sld>
+</file>
+
+<file path=ppt/slides/slide8.xml><?xml version="1.0" encoding="utf-8"?>
+<p:sld xmlns:a="http://schemas.openxmlformats.org/drawingml/2006/main" xmlns:p="http://schemas.openxmlformats.org/presentationml/2006/main" xmlns:r="http://schemas.openxmlformats.org/officeDocument/2006/relationships">
+  <p:cSld>
+    <p:spTree>
+      <p:nvGrpSpPr>
+        <p:cNvPr id="1" name=""/>
+        <p:cNvGrpSpPr/>
+        <p:nvPr/>
+      </p:nvGrpSpPr>
+      <p:grpSpPr/>
+      <p:sp>
+        <p:nvSpPr>
+          <p:cNvPr id="2" name="Title 1"/>
+          <p:cNvSpPr>
+            <a:spLocks noGrp="1"/>
+          </p:cNvSpPr>
+          <p:nvPr>
+            <p:ph type="title" idx="100"/>
+          </p:nvPr>
+        </p:nvSpPr>
+        <p:spPr/>
+        <p:txBody>
+          <a:bodyPr/>
+          <a:lstStyle/>
+          <a:p>
+            <a:r>
+              <a:t>2.1 GTFS 다섯 개 표의 연결</a:t>
+            </a:r>
+          </a:p>
+        </p:txBody>
+      </p:sp>
+      <p:sp>
+        <p:nvSpPr>
+          <p:cNvPr id="3" name="Text Placeholder 2"/>
+          <p:cNvSpPr>
+            <a:spLocks noGrp="1"/>
+          </p:cNvSpPr>
+          <p:nvPr>
+            <p:ph type="body" idx="101"/>
+          </p:nvPr>
+        </p:nvSpPr>
+        <p:spPr/>
+        <p:txBody>
+          <a:bodyPr/>
+          <a:lstStyle/>
+          <a:p>
+            <a:r>
+              <a:t>2. 교재 5.1 표 다섯 개</a:t>
+            </a:r>
+          </a:p>
+        </p:txBody>
+      </p:sp>
+      <p:sp>
+        <p:nvSpPr>
+          <p:cNvPr id="4" name="Text Placeholder 3"/>
+          <p:cNvSpPr>
+            <a:spLocks noGrp="1"/>
+          </p:cNvSpPr>
+          <p:nvPr>
+            <p:ph type="body" idx="102"/>
+          </p:nvPr>
+        </p:nvSpPr>
+        <p:spPr/>
+        <p:txBody>
+          <a:bodyPr/>
+          <a:lstStyle/>
+          <a:p>
+            <a:r>
+              <a:t>표 2. 이 과목에서 사용하는 GTFS 다섯 개 표와 연결 키</a:t>
             </a:r>
           </a:p>
         </p:txBody>
@@ -9169,7 +9759,7 @@
 </p:sld>
 </file>
 
-<file path=ppt/slides/slide8.xml><?xml version="1.0" encoding="utf-8"?>
+<file path=ppt/slides/slide9.xml><?xml version="1.0" encoding="utf-8"?>
 <p:sld xmlns:a="http://schemas.openxmlformats.org/drawingml/2006/main" xmlns:p="http://schemas.openxmlformats.org/presentationml/2006/main" xmlns:r="http://schemas.openxmlformats.org/officeDocument/2006/relationships">
   <p:cSld>
     <p:spTree>
@@ -9312,100 +9902,6 @@
               <a:t>1004</a:t>
             </a:fld>
             <a:endParaRPr lang="en-US"/>
-          </a:p>
-        </p:txBody>
-      </p:sp>
-    </p:spTree>
-  </p:cSld>
-  <p:clrMapOvr>
-    <a:masterClrMapping/>
-  </p:clrMapOvr>
-</p:sld>
-</file>
-
-<file path=ppt/slides/slide9.xml><?xml version="1.0" encoding="utf-8"?>
-<p:sld xmlns:a="http://schemas.openxmlformats.org/drawingml/2006/main" xmlns:p="http://schemas.openxmlformats.org/presentationml/2006/main" xmlns:r="http://schemas.openxmlformats.org/officeDocument/2006/relationships">
-  <p:cSld>
-    <p:spTree>
-      <p:nvGrpSpPr>
-        <p:cNvPr id="1" name=""/>
-        <p:cNvGrpSpPr/>
-        <p:nvPr/>
-      </p:nvGrpSpPr>
-      <p:grpSpPr/>
-      <p:sp>
-        <p:nvSpPr>
-          <p:cNvPr id="2" name="Text Placeholder 1"/>
-          <p:cNvSpPr>
-            <a:spLocks noGrp="1"/>
-          </p:cNvSpPr>
-          <p:nvPr>
-            <p:ph type="body" idx="100"/>
-          </p:nvPr>
-        </p:nvSpPr>
-        <p:spPr/>
-        <p:txBody>
-          <a:bodyPr/>
-          <a:lstStyle/>
-          <a:p>
-            <a:r>
-              <a:t>03</a:t>
-            </a:r>
-          </a:p>
-        </p:txBody>
-      </p:sp>
-      <p:sp>
-        <p:nvSpPr>
-          <p:cNvPr id="3" name="Title 2"/>
-          <p:cNvSpPr>
-            <a:spLocks noGrp="1"/>
-          </p:cNvSpPr>
-          <p:nvPr>
-            <p:ph type="title" idx="101"/>
-          </p:nvPr>
-        </p:nvSpPr>
-        <p:spPr/>
-        <p:txBody>
-          <a:bodyPr/>
-          <a:lstStyle/>
-          <a:p>
-            <a:r>
-              <a:t>교재 5.2 한국의 route_type</a:t>
-            </a:r>
-          </a:p>
-        </p:txBody>
-      </p:sp>
-      <p:sp>
-        <p:nvSpPr>
-          <p:cNvPr id="4" name="Text Placeholder 3"/>
-          <p:cNvSpPr>
-            <a:spLocks noGrp="1"/>
-          </p:cNvSpPr>
-          <p:nvPr>
-            <p:ph type="body" idx="102"/>
-          </p:nvPr>
-        </p:nvSpPr>
-        <p:spPr/>
-        <p:txBody>
-          <a:bodyPr/>
-          <a:lstStyle/>
-          <a:p>
-            <a:pPr>
-              <a:spcAft>
-                <a:spcPts val="1000"/>
-              </a:spcAft>
-            </a:pPr>
-            <a:r>
-              <a:rPr>
-                <a:solidFill>
-                  <a:srgbClr val="AFAFAF"/>
-                </a:solidFill>
-              </a:rPr>
-              <a:t>3.1  </a:t>
-            </a:r>
-            <a:r>
-              <a:t>TAGO 코드와 국제 명세</a:t>
-            </a:r>
           </a:p>
         </p:txBody>
       </p:sp>
